--- a/assets/pptx/catalog-474.pptx
+++ b/assets/pptx/catalog-474.pptx
@@ -3286,7 +3286,7 @@
                 <a:ea typeface="Ebrima"/>
                 <a:cs typeface="Ebrima"/>
               </a:rPr>
-              <a:t>መጨረሻው እጅግ ያምራል እግዚአብሔር የሰራዉ (2x)</a:t>
+              <a:t>መጨረሻው እጅግ ያምራል እግዚአብሔር የሰራዉ 2x</a:t>
             </a:r>
           </a:p>
         </p:txBody>
@@ -3371,7 +3371,7 @@
                 <a:ea typeface="Ebrima"/>
                 <a:cs typeface="Ebrima"/>
               </a:rPr>
-              <a:t>ይኼ ሁሉ በአንተ ነው ይኼ ሁሉ በአንተ ነው (5x)</a:t>
+              <a:t>ይኼ ሁሉ በአንተ ነው ይኼ ሁሉ በአንተ ነው 5x</a:t>
             </a:r>
           </a:p>
         </p:txBody>
@@ -3492,7 +3492,7 @@
                 <a:ea typeface="Ebrima"/>
                 <a:cs typeface="Ebrima"/>
               </a:rPr>
-              <a:t>ጊዜውን ጠብቀህ ይሁን ብለህ ያልከው (2x)</a:t>
+              <a:t>ጊዜውን ጠብቀህ ይሁን ብለህ ያልከው 2x</a:t>
             </a:r>
           </a:p>
         </p:txBody>
@@ -3595,7 +3595,7 @@
                 <a:ea typeface="Ebrima"/>
                 <a:cs typeface="Ebrima"/>
               </a:rPr>
-              <a:t>መጨረሻው እጅግ ያምራል እግዚአብሔር የሰራዉ (2x)</a:t>
+              <a:t>መጨረሻው እጅግ ያምራል እግዚአብሔር የሰራዉ 2x</a:t>
             </a:r>
           </a:p>
         </p:txBody>
@@ -3680,7 +3680,7 @@
                 <a:ea typeface="Ebrima"/>
                 <a:cs typeface="Ebrima"/>
               </a:rPr>
-              <a:t>አስደናቂ ነው ሥራ ለእኔ (2x)</a:t>
+              <a:t>አስደናቂ ነው ሥራ ለእኔ 2x</a:t>
             </a:r>
           </a:p>
         </p:txBody>
@@ -3801,7 +3801,7 @@
                 <a:ea typeface="Ebrima"/>
                 <a:cs typeface="Ebrima"/>
               </a:rPr>
-              <a:t>ጊዜውን ጠብቀህ ይሁን ብለህ ያልከው (2x)</a:t>
+              <a:t>ጊዜውን ጠብቀህ ይሁን ብለህ ያልከው 2x</a:t>
             </a:r>
           </a:p>
         </p:txBody>
@@ -3886,7 +3886,7 @@
                 <a:ea typeface="Ebrima"/>
                 <a:cs typeface="Ebrima"/>
               </a:rPr>
-              <a:t>አውቃለሁ ጌታዬ ሥራው ያስታውቃል (2x)</a:t>
+              <a:t>አውቃለሁ ጌታዬ ሥራው ያስታውቃል 2x</a:t>
             </a:r>
           </a:p>
         </p:txBody>
@@ -3971,7 +3971,7 @@
                 <a:ea typeface="Ebrima"/>
                 <a:cs typeface="Ebrima"/>
               </a:rPr>
-              <a:t>ይኼ ሁሉ በአንተ ነው ይኼ ሁሉ በአንተ ነው (2x)</a:t>
+              <a:t>ይኼ ሁሉ በአንተ ነው ይኼ ሁሉ በአንተ ነው 2x</a:t>
             </a:r>
           </a:p>
         </p:txBody>
@@ -4056,7 +4056,7 @@
                 <a:ea typeface="Ebrima"/>
                 <a:cs typeface="Ebrima"/>
               </a:rPr>
-              <a:t>አስደናቂ ነው ሥራ ለእኔ (2x)</a:t>
+              <a:t>አስደናቂ ነው ሥራ ለእኔ 2x</a:t>
             </a:r>
           </a:p>
         </p:txBody>
@@ -4177,7 +4177,7 @@
                 <a:ea typeface="Ebrima"/>
                 <a:cs typeface="Ebrima"/>
               </a:rPr>
-              <a:t>ጊዜውን ጠብቀህ ይሁን ብለህ ያልከው (2x)</a:t>
+              <a:t>ጊዜውን ጠብቀህ ይሁን ብለህ ያልከው 2x</a:t>
             </a:r>
           </a:p>
         </p:txBody>
